--- a/figs/fig3.pptx
+++ b/figs/fig3.pptx
@@ -245,7 +245,7 @@
           <a:p>
             <a:fld id="{B141880C-12A7-8548-8F4A-325AFAA66268}" type="datetimeFigureOut">
               <a:rPr lang="en-TW" smtClean="0"/>
-              <a:t>2025/4/14</a:t>
+              <a:t>2026/3/30</a:t>
             </a:fld>
             <a:endParaRPr lang="en-TW"/>
           </a:p>
@@ -415,7 +415,7 @@
           <a:p>
             <a:fld id="{B141880C-12A7-8548-8F4A-325AFAA66268}" type="datetimeFigureOut">
               <a:rPr lang="en-TW" smtClean="0"/>
-              <a:t>2025/4/14</a:t>
+              <a:t>2026/3/30</a:t>
             </a:fld>
             <a:endParaRPr lang="en-TW"/>
           </a:p>
@@ -595,7 +595,7 @@
           <a:p>
             <a:fld id="{B141880C-12A7-8548-8F4A-325AFAA66268}" type="datetimeFigureOut">
               <a:rPr lang="en-TW" smtClean="0"/>
-              <a:t>2025/4/14</a:t>
+              <a:t>2026/3/30</a:t>
             </a:fld>
             <a:endParaRPr lang="en-TW"/>
           </a:p>
@@ -765,7 +765,7 @@
           <a:p>
             <a:fld id="{B141880C-12A7-8548-8F4A-325AFAA66268}" type="datetimeFigureOut">
               <a:rPr lang="en-TW" smtClean="0"/>
-              <a:t>2025/4/14</a:t>
+              <a:t>2026/3/30</a:t>
             </a:fld>
             <a:endParaRPr lang="en-TW"/>
           </a:p>
@@ -1011,7 +1011,7 @@
           <a:p>
             <a:fld id="{B141880C-12A7-8548-8F4A-325AFAA66268}" type="datetimeFigureOut">
               <a:rPr lang="en-TW" smtClean="0"/>
-              <a:t>2025/4/14</a:t>
+              <a:t>2026/3/30</a:t>
             </a:fld>
             <a:endParaRPr lang="en-TW"/>
           </a:p>
@@ -1243,7 +1243,7 @@
           <a:p>
             <a:fld id="{B141880C-12A7-8548-8F4A-325AFAA66268}" type="datetimeFigureOut">
               <a:rPr lang="en-TW" smtClean="0"/>
-              <a:t>2025/4/14</a:t>
+              <a:t>2026/3/30</a:t>
             </a:fld>
             <a:endParaRPr lang="en-TW"/>
           </a:p>
@@ -1610,7 +1610,7 @@
           <a:p>
             <a:fld id="{B141880C-12A7-8548-8F4A-325AFAA66268}" type="datetimeFigureOut">
               <a:rPr lang="en-TW" smtClean="0"/>
-              <a:t>2025/4/14</a:t>
+              <a:t>2026/3/30</a:t>
             </a:fld>
             <a:endParaRPr lang="en-TW"/>
           </a:p>
@@ -1728,7 +1728,7 @@
           <a:p>
             <a:fld id="{B141880C-12A7-8548-8F4A-325AFAA66268}" type="datetimeFigureOut">
               <a:rPr lang="en-TW" smtClean="0"/>
-              <a:t>2025/4/14</a:t>
+              <a:t>2026/3/30</a:t>
             </a:fld>
             <a:endParaRPr lang="en-TW"/>
           </a:p>
@@ -1823,7 +1823,7 @@
           <a:p>
             <a:fld id="{B141880C-12A7-8548-8F4A-325AFAA66268}" type="datetimeFigureOut">
               <a:rPr lang="en-TW" smtClean="0"/>
-              <a:t>2025/4/14</a:t>
+              <a:t>2026/3/30</a:t>
             </a:fld>
             <a:endParaRPr lang="en-TW"/>
           </a:p>
@@ -2100,7 +2100,7 @@
           <a:p>
             <a:fld id="{B141880C-12A7-8548-8F4A-325AFAA66268}" type="datetimeFigureOut">
               <a:rPr lang="en-TW" smtClean="0"/>
-              <a:t>2025/4/14</a:t>
+              <a:t>2026/3/30</a:t>
             </a:fld>
             <a:endParaRPr lang="en-TW"/>
           </a:p>
@@ -2357,7 +2357,7 @@
           <a:p>
             <a:fld id="{B141880C-12A7-8548-8F4A-325AFAA66268}" type="datetimeFigureOut">
               <a:rPr lang="en-TW" smtClean="0"/>
-              <a:t>2025/4/14</a:t>
+              <a:t>2026/3/30</a:t>
             </a:fld>
             <a:endParaRPr lang="en-TW"/>
           </a:p>
@@ -2570,7 +2570,7 @@
           <a:p>
             <a:fld id="{B141880C-12A7-8548-8F4A-325AFAA66268}" type="datetimeFigureOut">
               <a:rPr lang="en-TW" smtClean="0"/>
-              <a:t>2025/4/14</a:t>
+              <a:t>2026/3/30</a:t>
             </a:fld>
             <a:endParaRPr lang="en-TW"/>
           </a:p>
@@ -3027,7 +3027,7 @@
         </p:blipFill>
         <p:spPr>
           <a:xfrm>
-            <a:off x="6153044" y="5574120"/>
+            <a:off x="6030299" y="5695289"/>
             <a:ext cx="8266038" cy="8229784"/>
           </a:xfrm>
           <a:prstGeom prst="rect">
@@ -3229,7 +3229,7 @@
               <a:rPr lang="en-TW" sz="2800" b="1" dirty="0">
                 <a:latin typeface="Helvetica" pitchFamily="2" charset="0"/>
               </a:rPr>
-              <a:t>A</a:t>
+              <a:t>C</a:t>
             </a:r>
           </a:p>
         </p:txBody>
@@ -3266,7 +3266,7 @@
               <a:rPr lang="en-TW" sz="2800" b="1" dirty="0">
                 <a:latin typeface="Helvetica" pitchFamily="2" charset="0"/>
               </a:rPr>
-              <a:t>B</a:t>
+              <a:t>D</a:t>
             </a:r>
           </a:p>
         </p:txBody>
@@ -3303,7 +3303,7 @@
               <a:rPr lang="en-TW" sz="2800" b="1" dirty="0">
                 <a:latin typeface="Helvetica" pitchFamily="2" charset="0"/>
               </a:rPr>
-              <a:t>C</a:t>
+              <a:t>E</a:t>
             </a:r>
           </a:p>
         </p:txBody>
@@ -3716,7 +3716,7 @@
               <a:rPr lang="en-TW" sz="2800" b="1" dirty="0">
                 <a:latin typeface="Helvetica" pitchFamily="2" charset="0"/>
               </a:rPr>
-              <a:t>E</a:t>
+              <a:t>B</a:t>
             </a:r>
           </a:p>
         </p:txBody>
@@ -4014,6 +4014,104 @@
           </p:txBody>
         </p:sp>
       </p:grpSp>
+      <p:pic>
+        <p:nvPicPr>
+          <p:cNvPr id="10" name="Picture 9">
+            <a:extLst>
+              <a:ext uri="{FF2B5EF4-FFF2-40B4-BE49-F238E27FC236}">
+                <a16:creationId xmlns:a16="http://schemas.microsoft.com/office/drawing/2014/main" id="{8630F2AE-0BB7-CC4A-1B7B-F9F3B6FA2EC4}"/>
+              </a:ext>
+            </a:extLst>
+          </p:cNvPr>
+          <p:cNvPicPr>
+            <a:picLocks noChangeAspect="1"/>
+          </p:cNvPicPr>
+          <p:nvPr/>
+        </p:nvPicPr>
+        <p:blipFill>
+          <a:blip r:embed="rId6"/>
+          <a:srcRect l="8441" t="7774" r="8208" b="9503"/>
+          <a:stretch>
+            <a:fillRect/>
+          </a:stretch>
+        </p:blipFill>
+        <p:spPr>
+          <a:xfrm>
+            <a:off x="6772949" y="596309"/>
+            <a:ext cx="5315957" cy="5275914"/>
+          </a:xfrm>
+          <a:prstGeom prst="ellipse">
+            <a:avLst/>
+          </a:prstGeom>
+        </p:spPr>
+      </p:pic>
+      <p:sp>
+        <p:nvSpPr>
+          <p:cNvPr id="11" name="TextBox 10">
+            <a:extLst>
+              <a:ext uri="{FF2B5EF4-FFF2-40B4-BE49-F238E27FC236}">
+                <a16:creationId xmlns:a16="http://schemas.microsoft.com/office/drawing/2014/main" id="{E0FAC896-76AC-0167-75A4-19197252A07D}"/>
+              </a:ext>
+            </a:extLst>
+          </p:cNvPr>
+          <p:cNvSpPr txBox="1"/>
+          <p:nvPr/>
+        </p:nvSpPr>
+        <p:spPr>
+          <a:xfrm>
+            <a:off x="6711712" y="686537"/>
+            <a:ext cx="606862" cy="523220"/>
+          </a:xfrm>
+          <a:prstGeom prst="rect">
+            <a:avLst/>
+          </a:prstGeom>
+          <a:noFill/>
+        </p:spPr>
+        <p:txBody>
+          <a:bodyPr wrap="square" rtlCol="0">
+            <a:spAutoFit/>
+          </a:bodyPr>
+          <a:lstStyle/>
+          <a:p>
+            <a:r>
+              <a:rPr lang="en-TW" sz="2800" b="1" dirty="0">
+                <a:latin typeface="Helvetica" pitchFamily="2" charset="0"/>
+              </a:rPr>
+              <a:t>A</a:t>
+            </a:r>
+          </a:p>
+        </p:txBody>
+      </p:sp>
+      <p:pic>
+        <p:nvPicPr>
+          <p:cNvPr id="2" name="Picture 1">
+            <a:extLst>
+              <a:ext uri="{FF2B5EF4-FFF2-40B4-BE49-F238E27FC236}">
+                <a16:creationId xmlns:a16="http://schemas.microsoft.com/office/drawing/2014/main" id="{DD10770C-95BB-1D5D-F7A8-55204895F6CB}"/>
+              </a:ext>
+            </a:extLst>
+          </p:cNvPr>
+          <p:cNvPicPr>
+            <a:picLocks noChangeAspect="1"/>
+          </p:cNvPicPr>
+          <p:nvPr/>
+        </p:nvPicPr>
+        <p:blipFill>
+          <a:blip r:embed="rId7"/>
+          <a:stretch>
+            <a:fillRect/>
+          </a:stretch>
+        </p:blipFill>
+        <p:spPr>
+          <a:xfrm>
+            <a:off x="12171520" y="12862035"/>
+            <a:ext cx="631052" cy="754053"/>
+          </a:xfrm>
+          <a:prstGeom prst="rect">
+            <a:avLst/>
+          </a:prstGeom>
+        </p:spPr>
+      </p:pic>
     </p:spTree>
     <p:extLst>
       <p:ext uri="{BB962C8B-B14F-4D97-AF65-F5344CB8AC3E}">
@@ -4064,7 +4162,7 @@
         </p:nvGrpSpPr>
         <p:grpSpPr>
           <a:xfrm>
-            <a:off x="4795102" y="3654416"/>
+            <a:off x="4753929" y="373712"/>
             <a:ext cx="5589838" cy="5119764"/>
             <a:chOff x="1196496" y="5005505"/>
             <a:chExt cx="5589838" cy="5119764"/>
@@ -4491,10 +4589,10 @@
         </p:nvGrpSpPr>
         <p:grpSpPr>
           <a:xfrm rot="716349">
-            <a:off x="9866775" y="4415504"/>
-            <a:ext cx="4437228" cy="3745724"/>
+            <a:off x="10167541" y="822178"/>
+            <a:ext cx="4044466" cy="3745724"/>
             <a:chOff x="1654648" y="9694215"/>
-            <a:chExt cx="4437228" cy="3745724"/>
+            <a:chExt cx="4044466" cy="3745724"/>
           </a:xfrm>
         </p:grpSpPr>
         <p:pic>
@@ -4578,8 +4676,8 @@
           </p:nvSpPr>
           <p:spPr>
             <a:xfrm rot="19362737">
-              <a:off x="4267575" y="10305652"/>
-              <a:ext cx="1824301" cy="338554"/>
+              <a:off x="4309411" y="10359858"/>
+              <a:ext cx="1377633" cy="461665"/>
             </a:xfrm>
             <a:prstGeom prst="rect">
               <a:avLst/>
@@ -4653,10 +4751,10 @@
         </p:nvGrpSpPr>
         <p:grpSpPr>
           <a:xfrm rot="20507640">
-            <a:off x="160968" y="3189748"/>
-            <a:ext cx="5300463" cy="5519798"/>
-            <a:chOff x="1133216" y="389457"/>
-            <a:chExt cx="5300463" cy="5519798"/>
+            <a:off x="674648" y="578770"/>
+            <a:ext cx="4512731" cy="5041719"/>
+            <a:chOff x="1133216" y="867536"/>
+            <a:chExt cx="4512731" cy="5041719"/>
           </a:xfrm>
         </p:grpSpPr>
         <p:pic>
@@ -4703,8 +4801,8 @@
           </p:nvSpPr>
           <p:spPr>
             <a:xfrm rot="18739500">
-              <a:off x="3506914" y="1134273"/>
-              <a:ext cx="1828185" cy="338554"/>
+              <a:off x="3596702" y="1275933"/>
+              <a:ext cx="1278459" cy="461665"/>
             </a:xfrm>
             <a:prstGeom prst="rect">
               <a:avLst/>
@@ -4721,13 +4819,7 @@
             <a:p>
               <a:r>
                 <a:rPr lang="en-US" sz="800" dirty="0"/>
-                <a:t>Cytokine production involved </a:t>
-              </a:r>
-            </a:p>
-            <a:p>
-              <a:r>
-                <a:rPr lang="en-US" sz="800" dirty="0"/>
-                <a:t>in immune response</a:t>
+                <a:t>Cytokine production involved  in immune response</a:t>
               </a:r>
               <a:endParaRPr lang="en-TW" sz="800" dirty="0"/>
             </a:p>
@@ -4747,8 +4839,8 @@
           </p:nvSpPr>
           <p:spPr>
             <a:xfrm rot="20869884">
-              <a:off x="4175712" y="2230805"/>
-              <a:ext cx="2257967" cy="338554"/>
+              <a:off x="4184663" y="2253214"/>
+              <a:ext cx="1461284" cy="461665"/>
             </a:xfrm>
             <a:prstGeom prst="rect">
               <a:avLst/>
@@ -4765,13 +4857,7 @@
             <a:p>
               <a:r>
                 <a:rPr lang="en-US" sz="800" dirty="0"/>
-                <a:t>Positive regulation of cytokine production </a:t>
-              </a:r>
-            </a:p>
-            <a:p>
-              <a:r>
-                <a:rPr lang="en-US" sz="800" dirty="0"/>
-                <a:t>involved in immune response</a:t>
+                <a:t>Positive regulation of cytokine production involved in immune response</a:t>
               </a:r>
             </a:p>
           </p:txBody>
@@ -4790,8 +4876,8 @@
           </p:nvSpPr>
           <p:spPr>
             <a:xfrm rot="1576523">
-              <a:off x="3963167" y="3889939"/>
-              <a:ext cx="2198861" cy="215444"/>
+              <a:off x="3986066" y="3701506"/>
+              <a:ext cx="1509090" cy="338554"/>
             </a:xfrm>
             <a:prstGeom prst="rect">
               <a:avLst/>
